--- a/Lecture Notes/PM_Lecture2.pptx
+++ b/Lecture Notes/PM_Lecture2.pptx
@@ -449,7 +449,7 @@
             </a:pPr>
             <a:fld id="{BA3B4573-DC42-814A-AA19-DDDB4F35D741}" type="datetime1">
               <a:rPr lang="en-US" smtClean="0"/>
-              <a:t>3/11/24</a:t>
+              <a:t>10/16/25</a:t>
             </a:fld>
             <a:endParaRPr lang="en-US"/>
           </a:p>
@@ -11732,7 +11732,12 @@
             <p:ph type="title"/>
           </p:nvPr>
         </p:nvSpPr>
-        <p:spPr/>
+        <p:spPr>
+          <a:xfrm>
+            <a:off x="0" y="19050"/>
+            <a:ext cx="9143999" cy="1192191"/>
+          </a:xfrm>
+        </p:spPr>
         <p:txBody>
           <a:bodyPr/>
           <a:lstStyle/>
@@ -11771,7 +11776,12 @@
             <p:ph type="body" idx="1"/>
           </p:nvPr>
         </p:nvSpPr>
-        <p:spPr/>
+        <p:spPr>
+          <a:xfrm>
+            <a:off x="183927" y="1406148"/>
+            <a:ext cx="8704579" cy="4739065"/>
+          </a:xfrm>
+        </p:spPr>
         <p:txBody>
           <a:bodyPr/>
           <a:lstStyle/>
